--- a/Design_Strategy_Competitor_Analysis.pptx
+++ b/Design_Strategy_Competitor_Analysis.pptx
@@ -312,7 +312,7 @@
           <a:p>
             <a:fld id="{5BCAD085-E8A6-8845-BD4E-CB4CCA059FC4}" type="datetimeFigureOut">
               <a:rPr lang="en-US" smtClean="0"/>
-              <a:t>5/5/2026</a:t>
+              <a:t>5/18/2026</a:t>
             </a:fld>
             <a:endParaRPr lang="en-US"/>
           </a:p>
@@ -480,7 +480,7 @@
           <a:p>
             <a:fld id="{5BCAD085-E8A6-8845-BD4E-CB4CCA059FC4}" type="datetimeFigureOut">
               <a:rPr lang="en-US" smtClean="0"/>
-              <a:t>5/5/2026</a:t>
+              <a:t>5/18/2026</a:t>
             </a:fld>
             <a:endParaRPr lang="en-US"/>
           </a:p>
@@ -658,7 +658,7 @@
           <a:p>
             <a:fld id="{5BCAD085-E8A6-8845-BD4E-CB4CCA059FC4}" type="datetimeFigureOut">
               <a:rPr lang="en-US" smtClean="0"/>
-              <a:t>5/5/2026</a:t>
+              <a:t>5/18/2026</a:t>
             </a:fld>
             <a:endParaRPr lang="en-US"/>
           </a:p>
@@ -826,7 +826,7 @@
           <a:p>
             <a:fld id="{5BCAD085-E8A6-8845-BD4E-CB4CCA059FC4}" type="datetimeFigureOut">
               <a:rPr lang="en-US" smtClean="0"/>
-              <a:t>5/5/2026</a:t>
+              <a:t>5/18/2026</a:t>
             </a:fld>
             <a:endParaRPr lang="en-US"/>
           </a:p>
@@ -1071,7 +1071,7 @@
           <a:p>
             <a:fld id="{5BCAD085-E8A6-8845-BD4E-CB4CCA059FC4}" type="datetimeFigureOut">
               <a:rPr lang="en-US" smtClean="0"/>
-              <a:t>5/5/2026</a:t>
+              <a:t>5/18/2026</a:t>
             </a:fld>
             <a:endParaRPr lang="en-US"/>
           </a:p>
@@ -1356,7 +1356,7 @@
           <a:p>
             <a:fld id="{5BCAD085-E8A6-8845-BD4E-CB4CCA059FC4}" type="datetimeFigureOut">
               <a:rPr lang="en-US" smtClean="0"/>
-              <a:t>5/5/2026</a:t>
+              <a:t>5/18/2026</a:t>
             </a:fld>
             <a:endParaRPr lang="en-US"/>
           </a:p>
@@ -1775,7 +1775,7 @@
           <a:p>
             <a:fld id="{5BCAD085-E8A6-8845-BD4E-CB4CCA059FC4}" type="datetimeFigureOut">
               <a:rPr lang="en-US" smtClean="0"/>
-              <a:t>5/5/2026</a:t>
+              <a:t>5/18/2026</a:t>
             </a:fld>
             <a:endParaRPr lang="en-US"/>
           </a:p>
@@ -1892,7 +1892,7 @@
           <a:p>
             <a:fld id="{5BCAD085-E8A6-8845-BD4E-CB4CCA059FC4}" type="datetimeFigureOut">
               <a:rPr lang="en-US" smtClean="0"/>
-              <a:t>5/5/2026</a:t>
+              <a:t>5/18/2026</a:t>
             </a:fld>
             <a:endParaRPr lang="en-US"/>
           </a:p>
@@ -1987,7 +1987,7 @@
           <a:p>
             <a:fld id="{5BCAD085-E8A6-8845-BD4E-CB4CCA059FC4}" type="datetimeFigureOut">
               <a:rPr lang="en-US" smtClean="0"/>
-              <a:t>5/5/2026</a:t>
+              <a:t>5/18/2026</a:t>
             </a:fld>
             <a:endParaRPr lang="en-US"/>
           </a:p>
@@ -2262,7 +2262,7 @@
           <a:p>
             <a:fld id="{5BCAD085-E8A6-8845-BD4E-CB4CCA059FC4}" type="datetimeFigureOut">
               <a:rPr lang="en-US" smtClean="0"/>
-              <a:t>5/5/2026</a:t>
+              <a:t>5/18/2026</a:t>
             </a:fld>
             <a:endParaRPr lang="en-US"/>
           </a:p>
@@ -2514,7 +2514,7 @@
           <a:p>
             <a:fld id="{5BCAD085-E8A6-8845-BD4E-CB4CCA059FC4}" type="datetimeFigureOut">
               <a:rPr lang="en-US" smtClean="0"/>
-              <a:t>5/5/2026</a:t>
+              <a:t>5/18/2026</a:t>
             </a:fld>
             <a:endParaRPr lang="en-US"/>
           </a:p>
@@ -2725,7 +2725,7 @@
           <a:p>
             <a:fld id="{5BCAD085-E8A6-8845-BD4E-CB4CCA059FC4}" type="datetimeFigureOut">
               <a:rPr lang="en-US" smtClean="0"/>
-              <a:t>5/5/2026</a:t>
+              <a:t>5/18/2026</a:t>
             </a:fld>
             <a:endParaRPr lang="en-US"/>
           </a:p>
@@ -11981,7 +11981,7 @@
         <p:spPr>
           <a:xfrm>
             <a:off x="7882127" y="4334255"/>
-            <a:ext cx="3840480" cy="256032"/>
+            <a:ext cx="3840480" cy="230832"/>
           </a:xfrm>
           <a:prstGeom prst="rect">
             <a:avLst/>
@@ -11996,9 +11996,9 @@
           <a:p>
             <a:pPr algn="l"/>
             <a:r>
-              <a:rPr sz="900" b="0" i="0">
-                <a:solidFill>
-                  <a:srgbClr val="0D0D0D"/>
+              <a:rPr sz="900" b="0" i="0" dirty="0">
+                <a:solidFill>
+                  <a:schemeClr val="bg1"/>
                 </a:solidFill>
               </a:rPr>
               <a:t>Warm orange — approachable retail energy</a:t>
@@ -12093,7 +12093,7 @@
         <p:spPr>
           <a:xfrm>
             <a:off x="7882127" y="4672583"/>
-            <a:ext cx="3840480" cy="256032"/>
+            <a:ext cx="3840480" cy="230832"/>
           </a:xfrm>
           <a:prstGeom prst="rect">
             <a:avLst/>
@@ -12110,7 +12110,7 @@
             <a:r>
               <a:rPr sz="900" b="0" i="0">
                 <a:solidFill>
-                  <a:srgbClr val="0D0D0D"/>
+                  <a:schemeClr val="bg1"/>
                 </a:solidFill>
               </a:rPr>
               <a:t>Pure black — gallery gravitas, art is colour</a:t>
@@ -12205,7 +12205,7 @@
         <p:spPr>
           <a:xfrm>
             <a:off x="7882127" y="5010912"/>
-            <a:ext cx="3840480" cy="256032"/>
+            <a:ext cx="3840480" cy="230832"/>
           </a:xfrm>
           <a:prstGeom prst="rect">
             <a:avLst/>
@@ -12222,7 +12222,7 @@
             <a:r>
               <a:rPr sz="900" b="0" i="0">
                 <a:solidFill>
-                  <a:srgbClr val="0D0D0D"/>
+                  <a:schemeClr val="bg1"/>
                 </a:solidFill>
               </a:rPr>
               <a:t>Near-black — product-focused minimalism</a:t>
@@ -12317,7 +12317,7 @@
         <p:spPr>
           <a:xfrm>
             <a:off x="7882127" y="5349240"/>
-            <a:ext cx="3840480" cy="256032"/>
+            <a:ext cx="3840480" cy="230832"/>
           </a:xfrm>
           <a:prstGeom prst="rect">
             <a:avLst/>
@@ -12334,7 +12334,7 @@
             <a:r>
               <a:rPr sz="900" b="0" i="0">
                 <a:solidFill>
-                  <a:srgbClr val="0D0D0D"/>
+                  <a:schemeClr val="bg1"/>
                 </a:solidFill>
               </a:rPr>
               <a:t>Vivid red — community &amp; energy</a:t>
@@ -12429,7 +12429,7 @@
         <p:spPr>
           <a:xfrm>
             <a:off x="7882127" y="5687567"/>
-            <a:ext cx="3840480" cy="256032"/>
+            <a:ext cx="3840480" cy="230832"/>
           </a:xfrm>
           <a:prstGeom prst="rect">
             <a:avLst/>
@@ -12446,7 +12446,7 @@
             <a:r>
               <a:rPr sz="900" b="0" i="0">
                 <a:solidFill>
-                  <a:srgbClr val="0D0D0D"/>
+                  <a:schemeClr val="bg1"/>
                 </a:solidFill>
               </a:rPr>
               <a:t>Terracotta — warm approachable premium</a:t>
@@ -12541,7 +12541,7 @@
         <p:spPr>
           <a:xfrm>
             <a:off x="7882127" y="6025896"/>
-            <a:ext cx="3840480" cy="256032"/>
+            <a:ext cx="3840480" cy="230832"/>
           </a:xfrm>
           <a:prstGeom prst="rect">
             <a:avLst/>
@@ -12558,7 +12558,7 @@
             <a:r>
               <a:rPr sz="900" b="0" i="0">
                 <a:solidFill>
-                  <a:srgbClr val="0D0D0D"/>
+                  <a:schemeClr val="bg1"/>
                 </a:solidFill>
               </a:rPr>
               <a:t>Coral — art-adjacent warmth, distinct from all 5</a:t>
